--- a/assets/pptx/catalog-58.pptx
+++ b/assets/pptx/catalog-58.pptx
@@ -3250,7 +3250,7 @@
                 <a:ea typeface="Ebrima"/>
                 <a:cs typeface="Ebrima"/>
               </a:rPr>
-              <a:t>(ቃል አለኝ) በልጅነቴ</a:t>
+              <a:t>ቃል አለኝ በልጅነቴ</a:t>
             </a:r>
           </a:p>
           <a:p>
@@ -3268,7 +3268,7 @@
                 <a:ea typeface="Ebrima"/>
                 <a:cs typeface="Ebrima"/>
               </a:rPr>
-              <a:t>(ቃል አለኝ) ቃል ገብቶልኛል</a:t>
+              <a:t>ቃል አለኝ ቃል ገብቶልኛል</a:t>
             </a:r>
           </a:p>
           <a:p>
@@ -3286,7 +3286,7 @@
                 <a:ea typeface="Ebrima"/>
                 <a:cs typeface="Ebrima"/>
               </a:rPr>
-              <a:t>(ቃል አለኝ) እንደማይተወኝ</a:t>
+              <a:t>ቃል አለኝ እንደማይተወኝ</a:t>
             </a:r>
           </a:p>
           <a:p>
@@ -3304,7 +3304,7 @@
                 <a:ea typeface="Ebrima"/>
                 <a:cs typeface="Ebrima"/>
               </a:rPr>
-              <a:t>(ቃል አለኝ) ጌታ ነግሮኛል</a:t>
+              <a:t>ቃል አለኝ ጌታ ነግሮኛል</a:t>
             </a:r>
           </a:p>
           <a:p>
@@ -3322,7 +3322,7 @@
                 <a:ea typeface="Ebrima"/>
                 <a:cs typeface="Ebrima"/>
               </a:rPr>
-              <a:t>(ቃል አለኝ) ከአሁን በኋላ</a:t>
+              <a:t>ቃል አለኝ ከአሁን በኋላ</a:t>
             </a:r>
           </a:p>
           <a:p>
@@ -3340,7 +3340,7 @@
                 <a:ea typeface="Ebrima"/>
                 <a:cs typeface="Ebrima"/>
               </a:rPr>
-              <a:t>(ቃል አለኝ) የምኖረው</a:t>
+              <a:t>ቃል አለኝ የምኖረው</a:t>
             </a:r>
           </a:p>
           <a:p>
@@ -3358,7 +3358,7 @@
                 <a:ea typeface="Ebrima"/>
                 <a:cs typeface="Ebrima"/>
               </a:rPr>
-              <a:t>(ቃል አለኝ) ቃሉን ከፊቴ</a:t>
+              <a:t>ቃል አለኝ ቃሉን ከፊቴ</a:t>
             </a:r>
           </a:p>
           <a:p>
@@ -3376,7 +3376,7 @@
                 <a:ea typeface="Ebrima"/>
                 <a:cs typeface="Ebrima"/>
               </a:rPr>
-              <a:t>(ቃል አለኝ) አስቀድሜ ነው</a:t>
+              <a:t>ቃል አለኝ አስቀድሜ ነው</a:t>
             </a:r>
           </a:p>
           <a:p>
@@ -3394,7 +3394,7 @@
                 <a:ea typeface="Ebrima"/>
                 <a:cs typeface="Ebrima"/>
               </a:rPr>
-              <a:t>ቃል አለኝ (5x)</a:t>
+              <a:t>ቃል አለኝ 5x</a:t>
             </a:r>
           </a:p>
         </p:txBody>
@@ -3461,7 +3461,7 @@
                 <a:ea typeface="Ebrima"/>
                 <a:cs typeface="Ebrima"/>
               </a:rPr>
-              <a:t>(ቃል አለኝ) በልጅነቴ</a:t>
+              <a:t>ቃል አለኝ በልጅነቴ</a:t>
             </a:r>
           </a:p>
           <a:p>
@@ -3479,7 +3479,7 @@
                 <a:ea typeface="Ebrima"/>
                 <a:cs typeface="Ebrima"/>
               </a:rPr>
-              <a:t>(ቃል አለኝ) ቃል ገብቶልኛል</a:t>
+              <a:t>ቃል አለኝ ቃል ገብቶልኛል</a:t>
             </a:r>
           </a:p>
           <a:p>
@@ -3497,7 +3497,7 @@
                 <a:ea typeface="Ebrima"/>
                 <a:cs typeface="Ebrima"/>
               </a:rPr>
-              <a:t>(ቃል አለኝ) እንደማይተወኝ</a:t>
+              <a:t>ቃል አለኝ እንደማይተወኝ</a:t>
             </a:r>
           </a:p>
           <a:p>
@@ -3515,7 +3515,7 @@
                 <a:ea typeface="Ebrima"/>
                 <a:cs typeface="Ebrima"/>
               </a:rPr>
-              <a:t>(ቃል አለኝ) ጌታ ነግሮኛል</a:t>
+              <a:t>ቃል አለኝ ጌታ ነግሮኛል</a:t>
             </a:r>
           </a:p>
           <a:p>
@@ -3533,7 +3533,7 @@
                 <a:ea typeface="Ebrima"/>
                 <a:cs typeface="Ebrima"/>
               </a:rPr>
-              <a:t>(ቃል አለኝ) ከአሁን በኋላ</a:t>
+              <a:t>ቃል አለኝ ከአሁን በኋላ</a:t>
             </a:r>
           </a:p>
           <a:p>
@@ -3551,7 +3551,7 @@
                 <a:ea typeface="Ebrima"/>
                 <a:cs typeface="Ebrima"/>
               </a:rPr>
-              <a:t>(ቃል አለኝ) የምኖረው</a:t>
+              <a:t>ቃል አለኝ የምኖረው</a:t>
             </a:r>
           </a:p>
           <a:p>
@@ -3569,7 +3569,7 @@
                 <a:ea typeface="Ebrima"/>
                 <a:cs typeface="Ebrima"/>
               </a:rPr>
-              <a:t>(ቃል አለኝ) ቃሉን ከፊቴ</a:t>
+              <a:t>ቃል አለኝ ቃሉን ከፊቴ</a:t>
             </a:r>
           </a:p>
           <a:p>
@@ -3587,7 +3587,7 @@
                 <a:ea typeface="Ebrima"/>
                 <a:cs typeface="Ebrima"/>
               </a:rPr>
-              <a:t>(ቃል አለኝ) አስቀድሜ ነው</a:t>
+              <a:t>ቃል አለኝ አስቀድሜ ነው</a:t>
             </a:r>
           </a:p>
           <a:p>
@@ -3883,7 +3883,7 @@
                 <a:ea typeface="Ebrima"/>
                 <a:cs typeface="Ebrima"/>
               </a:rPr>
-              <a:t>ቃል አለኝ ጌታ የሰጠኝ (2x)</a:t>
+              <a:t>ቃል አለኝ ጌታ የሰጠኝ 2x</a:t>
             </a:r>
           </a:p>
         </p:txBody>
@@ -3950,7 +3950,7 @@
                 <a:ea typeface="Ebrima"/>
                 <a:cs typeface="Ebrima"/>
               </a:rPr>
-              <a:t>(ቃል አለኝ) በልጅነቴ</a:t>
+              <a:t>ቃል አለኝ በልጅነቴ</a:t>
             </a:r>
           </a:p>
           <a:p>
@@ -3968,7 +3968,7 @@
                 <a:ea typeface="Ebrima"/>
                 <a:cs typeface="Ebrima"/>
               </a:rPr>
-              <a:t>(ቃል አለኝ) ቃል ገብቶልኛል</a:t>
+              <a:t>ቃል አለኝ ቃል ገብቶልኛል</a:t>
             </a:r>
           </a:p>
           <a:p>
@@ -3986,7 +3986,7 @@
                 <a:ea typeface="Ebrima"/>
                 <a:cs typeface="Ebrima"/>
               </a:rPr>
-              <a:t>(ቃል አለኝ) እንደማይተወኝ</a:t>
+              <a:t>ቃል አለኝ እንደማይተወኝ</a:t>
             </a:r>
           </a:p>
           <a:p>
@@ -4004,7 +4004,7 @@
                 <a:ea typeface="Ebrima"/>
                 <a:cs typeface="Ebrima"/>
               </a:rPr>
-              <a:t>(ቃል አለኝ) ጌታ ነግሮኛል</a:t>
+              <a:t>ቃል አለኝ ጌታ ነግሮኛል</a:t>
             </a:r>
           </a:p>
           <a:p>
@@ -4022,7 +4022,7 @@
                 <a:ea typeface="Ebrima"/>
                 <a:cs typeface="Ebrima"/>
               </a:rPr>
-              <a:t>(ቃል አለኝ) ከአሁን በኋላ</a:t>
+              <a:t>ቃል አለኝ ከአሁን በኋላ</a:t>
             </a:r>
           </a:p>
           <a:p>
@@ -4040,7 +4040,7 @@
                 <a:ea typeface="Ebrima"/>
                 <a:cs typeface="Ebrima"/>
               </a:rPr>
-              <a:t>(ቃል አለኝ) የምኖረው</a:t>
+              <a:t>ቃል አለኝ የምኖረው</a:t>
             </a:r>
           </a:p>
           <a:p>
@@ -4058,7 +4058,7 @@
                 <a:ea typeface="Ebrima"/>
                 <a:cs typeface="Ebrima"/>
               </a:rPr>
-              <a:t>(ቃል አለኝ) ቃሉን ከፊቴ</a:t>
+              <a:t>ቃል አለኝ ቃሉን ከፊቴ</a:t>
             </a:r>
           </a:p>
           <a:p>
@@ -4076,7 +4076,7 @@
                 <a:ea typeface="Ebrima"/>
                 <a:cs typeface="Ebrima"/>
               </a:rPr>
-              <a:t>(ቃል አለኝ) አስቀድሜ ነው</a:t>
+              <a:t>ቃል አለኝ አስቀድሜ ነው</a:t>
             </a:r>
           </a:p>
           <a:p>
@@ -4094,7 +4094,7 @@
                 <a:ea typeface="Ebrima"/>
                 <a:cs typeface="Ebrima"/>
               </a:rPr>
-              <a:t>ቃል አለኝ (5x)</a:t>
+              <a:t>ቃል አለኝ 5x</a:t>
             </a:r>
           </a:p>
         </p:txBody>
@@ -4372,7 +4372,7 @@
                 <a:ea typeface="Ebrima"/>
                 <a:cs typeface="Ebrima"/>
               </a:rPr>
-              <a:t>ቃል አለኝ ጌታ የሰጠኝ (2x)</a:t>
+              <a:t>ቃል አለኝ ጌታ የሰጠኝ 2x</a:t>
             </a:r>
           </a:p>
         </p:txBody>
@@ -4439,7 +4439,7 @@
                 <a:ea typeface="Ebrima"/>
                 <a:cs typeface="Ebrima"/>
               </a:rPr>
-              <a:t>(ቃል አለኝ) በልጅነቴ</a:t>
+              <a:t>ቃል አለኝ በልጅነቴ</a:t>
             </a:r>
           </a:p>
           <a:p>
@@ -4457,7 +4457,7 @@
                 <a:ea typeface="Ebrima"/>
                 <a:cs typeface="Ebrima"/>
               </a:rPr>
-              <a:t>(ቃል አለኝ) ቃል ገብቶልኛል</a:t>
+              <a:t>ቃል አለኝ ቃል ገብቶልኛል</a:t>
             </a:r>
           </a:p>
           <a:p>
@@ -4475,7 +4475,7 @@
                 <a:ea typeface="Ebrima"/>
                 <a:cs typeface="Ebrima"/>
               </a:rPr>
-              <a:t>(ቃል አለኝ) እንደማይተወኝ</a:t>
+              <a:t>ቃል አለኝ እንደማይተወኝ</a:t>
             </a:r>
           </a:p>
           <a:p>
@@ -4493,7 +4493,7 @@
                 <a:ea typeface="Ebrima"/>
                 <a:cs typeface="Ebrima"/>
               </a:rPr>
-              <a:t>(ቃል አለኝ) ጌታ ነግሮኛል</a:t>
+              <a:t>ቃል አለኝ ጌታ ነግሮኛል</a:t>
             </a:r>
           </a:p>
           <a:p>
@@ -4511,7 +4511,7 @@
                 <a:ea typeface="Ebrima"/>
                 <a:cs typeface="Ebrima"/>
               </a:rPr>
-              <a:t>(ቃል አለኝ) ከአሁን በኋላ</a:t>
+              <a:t>ቃል አለኝ ከአሁን በኋላ</a:t>
             </a:r>
           </a:p>
           <a:p>
@@ -4529,7 +4529,7 @@
                 <a:ea typeface="Ebrima"/>
                 <a:cs typeface="Ebrima"/>
               </a:rPr>
-              <a:t>(ቃል አለኝ) የምኖረው</a:t>
+              <a:t>ቃል አለኝ የምኖረው</a:t>
             </a:r>
           </a:p>
           <a:p>
@@ -4547,7 +4547,7 @@
                 <a:ea typeface="Ebrima"/>
                 <a:cs typeface="Ebrima"/>
               </a:rPr>
-              <a:t>(ቃል አለኝ) ቃሉን ከፊቴ</a:t>
+              <a:t>ቃል አለኝ ቃሉን ከፊቴ</a:t>
             </a:r>
           </a:p>
           <a:p>
@@ -4565,7 +4565,7 @@
                 <a:ea typeface="Ebrima"/>
                 <a:cs typeface="Ebrima"/>
               </a:rPr>
-              <a:t>(ቃል አለኝ) አስቀድሜ ነው</a:t>
+              <a:t>ቃል አለኝ አስቀድሜ ነው</a:t>
             </a:r>
           </a:p>
           <a:p>
@@ -4583,7 +4583,7 @@
                 <a:ea typeface="Ebrima"/>
                 <a:cs typeface="Ebrima"/>
               </a:rPr>
-              <a:t>ቃል አለኝ (5x)</a:t>
+              <a:t>ቃል አለኝ 5x</a:t>
             </a:r>
           </a:p>
         </p:txBody>
@@ -4861,7 +4861,7 @@
                 <a:ea typeface="Ebrima"/>
                 <a:cs typeface="Ebrima"/>
               </a:rPr>
-              <a:t>ቃል አለኝ ጌታ የሰጠኝ (2x)</a:t>
+              <a:t>ቃል አለኝ ጌታ የሰጠኝ 2x</a:t>
             </a:r>
           </a:p>
         </p:txBody>
